--- a/docs/slides/EGGC_2026-08-17.pptx
+++ b/docs/slides/EGGC_2026-08-17.pptx
@@ -5418,7 +5418,7 @@
         <p:spPr>
           <a:xfrm>
             <a:off x="6233007" y="2632202"/>
-            <a:ext cx="5391759" cy="1282700"/>
+            <a:ext cx="5391759" cy="1587500"/>
           </a:xfrm>
           <a:prstGeom prst="rect">
             <a:avLst/>
@@ -5469,17 +5469,13 @@
               </a:rPr>
               <a:t>?case=甲浦&amp;step=4</a:t>
             </a:r>
-            <a:r>
-              <a:rPr sz="1600">
-                <a:solidFill>
-                  <a:srgbClr val="141413"/>
-                </a:solidFill>
-                <a:latin typeface="Avenir Next"/>
-                <a:ea typeface="Hiragino Sans"/>
-                <a:cs typeface="Hiragino Sans"/>
-              </a:rPr>
-              <a:t> </a:t>
-            </a:r>
+          </a:p>
+          <a:p>
+            <a:pPr>
+              <a:spcBef>
+                <a:spcPts val="400"/>
+              </a:spcBef>
+            </a:pPr>
             <a:r>
               <a:rPr sz="1600">
                 <a:solidFill>
